--- a/reporting/assets/review-deck-template.pptx
+++ b/reporting/assets/review-deck-template.pptx
@@ -4323,7 +4323,7 @@
                 </a:solidFill>
                 <a:latin typeface="JetBrains Mono"/>
               </a:rPr>
-              <a:t>EVALATION ENGINE  ·  {{AUDIT TYPE}}</a:t>
+              <a:t>EVALATION  ·  {{AUDIT TYPE}}</a:t>
             </a:r>
           </a:p>
         </p:txBody>
@@ -5726,7 +5726,7 @@
                 </a:solidFill>
                 <a:latin typeface="JetBrains Mono"/>
               </a:rPr>
-              <a:t>EVALATION ENGINE  ·  EXECUTIVE SUMMARY</a:t>
+              <a:t>EVALATION  ·  EXECUTIVE SUMMARY</a:t>
             </a:r>
           </a:p>
         </p:txBody>
@@ -6500,7 +6500,7 @@
                 </a:solidFill>
                 <a:latin typeface="JetBrains Mono"/>
               </a:rPr>
-              <a:t>EVALATION ENGINE  ·  {{AUDIT TYPE}}</a:t>
+              <a:t>EVALATION  ·  {{AUDIT TYPE}}</a:t>
             </a:r>
           </a:p>
         </p:txBody>
@@ -11103,7 +11103,7 @@
                 </a:solidFill>
                 <a:latin typeface="JetBrains Mono"/>
               </a:rPr>
-              <a:t>EVALATION ENGINE  ·  {{AUDIT TYPE}}</a:t>
+              <a:t>EVALATION  ·  {{AUDIT TYPE}}</a:t>
             </a:r>
           </a:p>
         </p:txBody>
@@ -13418,7 +13418,7 @@
                 </a:solidFill>
                 <a:latin typeface="JetBrains Mono"/>
               </a:rPr>
-              <a:t>EVALATION ENGINE  ·  {{AUDIT TYPE}}</a:t>
+              <a:t>EVALATION  ·  {{AUDIT TYPE}}</a:t>
             </a:r>
           </a:p>
         </p:txBody>
@@ -14253,7 +14253,7 @@
                 </a:solidFill>
                 <a:latin typeface="JetBrains Mono"/>
               </a:rPr>
-              <a:t>EVALATION ENGINE  ·  {{AUDIT TYPE}}</a:t>
+              <a:t>EVALATION  ·  {{AUDIT TYPE}}</a:t>
             </a:r>
           </a:p>
         </p:txBody>
@@ -16991,7 +16991,7 @@
                 </a:solidFill>
                 <a:latin typeface="JetBrains Mono"/>
               </a:rPr>
-              <a:t>EVALATION ENGINE  ·  {{AUDIT TYPE}}</a:t>
+              <a:t>EVALATION  ·  {{AUDIT TYPE}}</a:t>
             </a:r>
           </a:p>
         </p:txBody>
@@ -18027,7 +18027,7 @@
                 </a:solidFill>
                 <a:latin typeface="JetBrains Mono"/>
               </a:rPr>
-              <a:t>EVALATION ENGINE  ·  {{AUDIT TYPE}}</a:t>
+              <a:t>EVALATION  ·  {{AUDIT TYPE}}</a:t>
             </a:r>
           </a:p>
         </p:txBody>
@@ -19514,7 +19514,7 @@
                 </a:solidFill>
                 <a:latin typeface="JetBrains Mono"/>
               </a:rPr>
-              <a:t>EVALATION ENGINE  ·  {{AUDIT TYPE}}</a:t>
+              <a:t>EVALATION  ·  {{AUDIT TYPE}}</a:t>
             </a:r>
           </a:p>
         </p:txBody>
@@ -20769,7 +20769,7 @@
                 </a:solidFill>
                 <a:latin typeface="JetBrains Mono"/>
               </a:rPr>
-              <a:t>EVALATION ENGINE  ·  {{AUDIT TYPE}}</a:t>
+              <a:t>EVALATION  ·  {{AUDIT TYPE}}</a:t>
             </a:r>
           </a:p>
         </p:txBody>
